--- a/disciplina-08-indicadores-socioeconomicos/materiais/03_Unidade_3_Produtores_de_Dados_e_Fontes.pptx
+++ b/disciplina-08-indicadores-socioeconomicos/materiais/03_Unidade_3_Produtores_de_Dados_e_Fontes.pptx
@@ -31,9 +31,10 @@
     <p:sldId id="279" r:id="rId25"/>
     <p:sldId id="280" r:id="rId26"/>
     <p:sldId id="281" r:id="rId27"/>
+    <p:sldId id="282" r:id="rId28"/>
   </p:sldIdLst>
   <p:notesMasterIdLst>
-    <p:notesMasterId r:id="rId28"/>
+    <p:notesMasterId r:id="rId29"/>
   </p:notesMasterIdLst>
   <p:sldSz cx="9144000" cy="5143500"/>
   <p:notesSz cx="5143500" cy="9144000"/>
@@ -1021,7 +1022,7 @@
           <a:p>
             <a:r>
               <a:rPr lang="en-US" dirty="0"/>
-              <a:t/>
+              <a:t>Olá, turma! Chegamos à Unidade 3: produtores de dados e fontes de informação. Já sabemos o que é um indicador e como usá-lo em um diagnóstico. Agora, a pergunta é: onde encontrar os dados? Vamos conhecer quem produz as informações no Brasil e as principais fontes que o gestor pode usar.</a:t>
             </a:r>
             <a:endParaRPr lang="en-US" dirty="0"/>
           </a:p>
@@ -1109,7 +1110,7 @@
           <a:p>
             <a:r>
               <a:rPr lang="en-US" dirty="0"/>
-              <a:t/>
+              <a:t>A tabela mostra os principais registros administrativos. O SIM e o SINASC, do Ministério da Saúde, pelo DATASUS, permitem calcular a mortalidade infantil e por causas, os nascidos vivos e o pré-natal. O Censo Escolar e o SAEB, do INEP, trazem matrículas, aprovação, distorção idade-série e o IDEB. A RAIS e o Novo CAGED, do Ministério do Trabalho, mostram o emprego formal, os salários e o saldo mensal de vagas. O SICONFI, do Tesouro Nacional, traz receitas, despesas e o gasto com pessoal dos municípios. E as estatísticas do TSE mostram o eleitorado e a participação. A vantagem é ter dados municipais e frequentes; o limite é que, por exemplo, a RAIS não capta o trabalho informal.</a:t>
             </a:r>
             <a:endParaRPr lang="en-US" dirty="0"/>
           </a:p>
@@ -1197,7 +1198,7 @@
           <a:p>
             <a:r>
               <a:rPr lang="en-US" dirty="0"/>
-              <a:t/>
+              <a:t>O Cadastro Único, o CadÚnico, é o registro das famílias de baixa renda, com dados de moradia, escolaridade, trabalho e renda. É a base do Bolsa Família, da tarifa social de energia e de dezenas de programas. Com ele, o município pode localizar as famílias vulneráveis por bairro e focalizar as ações. Mas cuidado: é um cadastro de demanda, não um censo. Quem não se cadastrou não aparece, e os dados dependem de atualização periódica pelas equipes municipais.</a:t>
             </a:r>
             <a:endParaRPr lang="en-US" dirty="0"/>
           </a:p>
@@ -1285,7 +1286,7 @@
           <a:p>
             <a:r>
               <a:rPr lang="en-US" dirty="0"/>
-              <a:t/>
+              <a:t>O gráfico mostra o perfil das famílias cadastradas em um município hipotético. [Apontar para as fatias.] Quase metade, 48%, está na faixa de renda de até 218 reais por pessoa, a faixa do Bolsa Família. Outros 32% estão entre 218 reais e meio salário mínimo, e 20% acima de meio salário mínimo. Os dados reais do seu município estão nos painéis do Ministério do Desenvolvimento Social. E lembre: quem não se cadastrou não aparece.</a:t>
             </a:r>
             <a:endParaRPr lang="en-US" dirty="0"/>
           </a:p>
@@ -1373,7 +1374,7 @@
           <a:p>
             <a:r>
               <a:rPr lang="en-US" dirty="0"/>
-              <a:t/>
+              <a:t>Onde encontrar os dados? Há vários portais de acesso livre. O IBGE Cidades traz um panorama de cada município. O SIDRA reúne as tabelas das pesquisas do IBGE. O Atlas Brasil traz o IDHM e indicadores municipais. O DATASUS, com o TabNet, traz os dados de saúde. O INEP traz o Censo Escolar, o IDEB e o SAEB. E o Portal da Transparência mostra os recursos federais e os beneficiários.</a:t>
             </a:r>
             <a:endParaRPr lang="en-US" dirty="0"/>
           </a:p>
@@ -1461,7 +1462,7 @@
           <a:p>
             <a:r>
               <a:rPr lang="en-US" dirty="0"/>
-              <a:t/>
+              <a:t>Para fechar esta parte, qual fonte usar para cada indicador? A população por faixa etária vem do Censo 2022 e das estimativas do IBGE. A taxa de mortalidade infantil, do SIM e do SINASC. O IDEB e a taxa de aprovação, do INEP. O saldo de empregos formais, do Novo CAGED. As famílias em situação de pobreza cadastradas, do CadÚnico. E a receita própria do município, do SICONFI. Uma regra de ouro: sempre cite a fonte e o ano de referência do dado.</a:t>
             </a:r>
             <a:endParaRPr lang="en-US" dirty="0"/>
           </a:p>
@@ -1549,7 +1550,7 @@
           <a:p>
             <a:r>
               <a:rPr lang="en-US" dirty="0"/>
-              <a:t/>
+              <a:t>Vamos às atividades da Unidade 3, com as datas no SIGAA. Nesta semana, assista a esta videoaula e faça a leitura. Participe do encontro síncrono, às 19h, pelo Google Meet, com dúvidas e orientações para a A2 e a A3. E, no fórum temático 2, monte uma ficha com cinco indicadores do seu município e as respectivas fontes. Na próxima unidade, os dados e indicadores econômicos e os boletins de conjuntura.</a:t>
             </a:r>
             <a:endParaRPr lang="en-US" dirty="0"/>
           </a:p>
@@ -1637,7 +1638,7 @@
           <a:p>
             <a:r>
               <a:rPr lang="en-US" dirty="0"/>
-              <a:t/>
+              <a:t>Vamos ao quiz da Unidade 3: cinco perguntas. Pause, responda e confira no slide seguinte.</a:t>
             </a:r>
             <a:endParaRPr lang="en-US" dirty="0"/>
           </a:p>
@@ -1725,7 +1726,7 @@
           <a:p>
             <a:r>
               <a:rPr lang="en-US" dirty="0"/>
-              <a:t/>
+              <a:t>Pergunta 1. Qual fonte oferece dados para todos os municípios e bairros, mas só a cada 10 anos? Letra a: PNAD Contínua. Letra b: Censo Demográfico. Letra c: Boletim Focus. Letra d: POF. Pause o vídeo e escolha a sua resposta.</a:t>
             </a:r>
             <a:endParaRPr lang="en-US" dirty="0"/>
           </a:p>
@@ -1813,7 +1814,7 @@
           <a:p>
             <a:r>
               <a:rPr lang="en-US" dirty="0"/>
-              <a:t/>
+              <a:t>A resposta correta é a letra b: Censo Demográfico. O Censo é universal e decenal; o mais recente é de 2022.</a:t>
             </a:r>
             <a:endParaRPr lang="en-US" dirty="0"/>
           </a:p>
@@ -1901,7 +1902,7 @@
           <a:p>
             <a:r>
               <a:rPr lang="en-US" dirty="0"/>
-              <a:t/>
+              <a:t>Pergunta 2. A taxa de desocupação trimestral vem da: Letra a: PNAD Contínua. Letra b: RAIS. Letra c: MUNIC. Letra d: SINASC. Pause o vídeo e escolha a sua resposta.</a:t>
             </a:r>
             <a:endParaRPr lang="en-US" dirty="0"/>
           </a:p>
@@ -1989,7 +1990,7 @@
           <a:p>
             <a:r>
               <a:rPr lang="en-US" dirty="0"/>
-              <a:t/>
+              <a:t>Esta é a terceira semana da disciplina, com as datas no SIGAA. A leitura é o livro de Jannuzzi, na parte sobre fontes de dados, junto com os tópicos 5 e 6 do sumário da página de conteúdos. E atenção: nesta semana acontece o nosso encontro síncrono, às 19h, o único da disciplina. A presença conta para a frequência.</a:t>
             </a:r>
             <a:endParaRPr lang="en-US" dirty="0"/>
           </a:p>
@@ -2077,7 +2078,7 @@
           <a:p>
             <a:r>
               <a:rPr lang="en-US" dirty="0"/>
-              <a:t/>
+              <a:t>A resposta correta é a letra a: PNAD Contínua. A PNAD Contínua investiga trabalho e rendimento a cada trimestre.</a:t>
             </a:r>
             <a:endParaRPr lang="en-US" dirty="0"/>
           </a:p>
@@ -2165,7 +2166,7 @@
           <a:p>
             <a:r>
               <a:rPr lang="en-US" dirty="0"/>
-              <a:t/>
+              <a:t>Pergunta 3. Os dados de óbitos e nascidos vivos vêm de: Letra a: Censo Escolar. Letra b: CadÚnico. Letra c: SIM e SINASC. Letra d: SICONFI. Pause o vídeo e escolha a sua resposta.</a:t>
             </a:r>
             <a:endParaRPr lang="en-US" dirty="0"/>
           </a:p>
@@ -2253,7 +2254,7 @@
           <a:p>
             <a:r>
               <a:rPr lang="en-US" dirty="0"/>
-              <a:t/>
+              <a:t>A resposta correta é a letra c: SIM e SINASC. São sistemas de informação do Ministério da Saúde, disponíveis no DATASUS.</a:t>
             </a:r>
             <a:endParaRPr lang="en-US" dirty="0"/>
           </a:p>
@@ -2341,7 +2342,7 @@
           <a:p>
             <a:r>
               <a:rPr lang="en-US" dirty="0"/>
-              <a:t/>
+              <a:t>Pergunta 4. Uma limitação do CadÚnico é: Letra a: Não ter dados municipais. Letra b: Ser realizado a cada dez anos. Letra c: Medir apenas a inflação. Letra d: Registrar só quem se cadastrou. Pause o vídeo e escolha a sua resposta.</a:t>
             </a:r>
             <a:endParaRPr lang="en-US" dirty="0"/>
           </a:p>
@@ -2429,7 +2430,7 @@
           <a:p>
             <a:r>
               <a:rPr lang="en-US" dirty="0"/>
-              <a:t/>
+              <a:t>A resposta correta é a letra d: Registrar só quem se cadastrou. É um cadastro de demanda: famílias que não se cadastraram não aparecem.</a:t>
             </a:r>
             <a:endParaRPr lang="en-US" dirty="0"/>
           </a:p>
@@ -2517,7 +2518,7 @@
           <a:p>
             <a:r>
               <a:rPr lang="en-US" dirty="0"/>
-              <a:t/>
+              <a:t>Pergunta 5. A pesquisa do IBGE sobre a estrutura e a gestão das prefeituras é a: Letra a: POF. Letra b: MUNIC. Letra c: PNS. Letra d: PAM. Pause o vídeo e escolha a sua resposta.</a:t>
             </a:r>
             <a:endParaRPr lang="en-US" dirty="0"/>
           </a:p>
@@ -2605,7 +2606,7 @@
           <a:p>
             <a:r>
               <a:rPr lang="en-US" dirty="0"/>
-              <a:t/>
+              <a:t>A resposta correta é a letra b: MUNIC. A MUNIC traz dados sobre conselhos, planos, órgãos e políticas municipais.</a:t>
             </a:r>
             <a:endParaRPr lang="en-US" dirty="0"/>
           </a:p>
@@ -2629,6 +2630,94 @@
             <a:fld id="{F7021451-1387-4CA6-816F-3879F97B5CBC}" type="slidenum">
               <a:rPr lang="en-US"/>
               <a:t>26</a:t>
+            </a:fld>
+            <a:endParaRPr lang="en-US"/>
+          </a:p>
+        </p:txBody>
+      </p:sp>
+    </p:spTree>
+    <p:extLst>
+      <p:ext uri="{BB962C8B-B14F-4D97-AF65-F5344CB8AC3E}">
+        <p14:creationId xmlns:p14="http://schemas.microsoft.com/office/powerpoint/2010/main" val="1024086991"/>
+      </p:ext>
+    </p:extLst>
+  </p:cSld>
+  <p:clrMapOvr>
+    <a:masterClrMapping/>
+  </p:clrMapOvr>
+</p:notes>
+</file>
+
+<file path=ppt/notesSlides/notesSlide27.xml><?xml version="1.0" encoding="utf-8"?>
+<p:notes xmlns:a="http://schemas.openxmlformats.org/drawingml/2006/main" xmlns:r="http://schemas.openxmlformats.org/officeDocument/2006/relationships" xmlns:p="http://schemas.openxmlformats.org/presentationml/2006/main">
+  <p:cSld>
+    <p:spTree>
+      <p:nvGrpSpPr>
+        <p:cNvPr id="1" name=""/>
+        <p:cNvGrpSpPr/>
+        <p:nvPr/>
+      </p:nvGrpSpPr>
+      <p:grpSpPr>
+        <a:xfrm>
+          <a:off x="0" y="0"/>
+          <a:ext cx="0" cy="0"/>
+          <a:chOff x="0" y="0"/>
+          <a:chExt cx="0" cy="0"/>
+        </a:xfrm>
+      </p:grpSpPr>
+      <p:sp>
+        <p:nvSpPr>
+          <p:cNvPr id="2" name="Slide Image Placeholder 1"/>
+          <p:cNvSpPr>
+            <a:spLocks noGrp="1" noRot="1" noChangeAspect="1"/>
+          </p:cNvSpPr>
+          <p:nvPr>
+            <p:ph type="sldImg"/>
+          </p:nvPr>
+        </p:nvSpPr>
+        <p:spPr/>
+      </p:sp>
+      <p:sp>
+        <p:nvSpPr>
+          <p:cNvPr id="3" name="Notes Placeholder 2"/>
+          <p:cNvSpPr>
+            <a:spLocks noGrp="1"/>
+          </p:cNvSpPr>
+          <p:nvPr>
+            <p:ph type="body" idx="1"/>
+          </p:nvPr>
+        </p:nvSpPr>
+        <p:spPr/>
+        <p:txBody>
+          <a:bodyPr/>
+          <a:lstStyle/>
+          <a:p>
+            <a:r>
+              <a:rPr lang="en-US" dirty="0"/>
+              <a:t>Para fechar a Unidade 3, vamos recapitular. [Apontar para o quadro da esquerda.] No tópico 5, vimos que o IBGE coordena o sistema estatístico, com os ministérios, o Banco Central, o Tesouro e instituições como o IPEA, o PNUD e a Fundação João Pinheiro. Comparamos censos, pesquisas amostrais e registros, estudamos o Censo 2022 e as pesquisas PNAD Contínua, POF, PNS e MUNIC, que em geral não trazem dados municipais. [Apontar para o quadro da direita.] No tópico 6, conhecemos os registros administrativos, o CadÚnico e os seus cuidados, os portais de acesso livre e a fonte de cada indicador. Na próxima unidade, os indicadores econômicos e a conjuntura. Nos vemos no encontro síncrono. Até lá!</a:t>
+            </a:r>
+            <a:endParaRPr lang="en-US" dirty="0"/>
+          </a:p>
+        </p:txBody>
+      </p:sp>
+      <p:sp>
+        <p:nvSpPr>
+          <p:cNvPr id="4" name="Slide Number Placeholder 3"/>
+          <p:cNvSpPr>
+            <a:spLocks noGrp="1"/>
+          </p:cNvSpPr>
+          <p:nvPr>
+            <p:ph type="sldNum" sz="quarter" idx="10"/>
+          </p:nvPr>
+        </p:nvSpPr>
+        <p:spPr/>
+        <p:txBody>
+          <a:bodyPr/>
+          <a:lstStyle/>
+          <a:p>
+            <a:fld id="{F7021451-1387-4CA6-816F-3879F97B5CBC}" type="slidenum">
+              <a:rPr lang="en-US"/>
+              <a:t>27</a:t>
             </a:fld>
             <a:endParaRPr lang="en-US"/>
           </a:p>
@@ -2693,7 +2782,7 @@
           <a:p>
             <a:r>
               <a:rPr lang="en-US" dirty="0"/>
-              <a:t/>
+              <a:t>Parte 1, que corresponde ao tópico 5 do sumário: produtores de dados, Censo e pesquisas do IBGE. Quem produz as informações que o gestor usa?</a:t>
             </a:r>
             <a:endParaRPr lang="en-US" dirty="0"/>
           </a:p>
@@ -2781,7 +2870,7 @@
           <a:p>
             <a:r>
               <a:rPr lang="en-US" dirty="0"/>
-              <a:t/>
+              <a:t>O IBGE coordena o sistema estatístico nacional, com os censos, as pesquisas amostrais e as contas nacionais. Os ministérios produzem dados setoriais: a Saúde, pelo DATASUS; a Educação, pelo INEP; o Trabalho, pela RAIS e pelo CAGED; e o Desenvolvimento Social, pelo CadÚnico. O Banco Central e o Tesouro produzem dados econômicos e fiscais, como o SICONFI. E instituições como o IPEA, o PNUD e a Fundação João Pinheiro, responsáveis pelo Atlas Brasil, além dos institutos estaduais, completam o sistema.</a:t>
             </a:r>
             <a:endParaRPr lang="en-US" dirty="0"/>
           </a:p>
@@ -2869,7 +2958,7 @@
           <a:p>
             <a:r>
               <a:rPr lang="en-US" dirty="0"/>
-              <a:t/>
+              <a:t>Existem três tipos de fonte, cada um com vantagens e limites. Os censos cobrem toda a população e trazem dados para municípios e bairros, mas são caros e feitos a cada dez anos. As pesquisas amostrais são frequentes, detalhadas e de custo menor, mas em geral não trazem dados municipais. E os registros administrativos são contínuos, municipais e baratos, mas só cobrem quem é registrado e dependem da qualidade do registro. O bom diagnóstico combina as três: o censo como base, as pesquisas para temas específicos e os registros para acompanhar a evolução.</a:t>
             </a:r>
             <a:endParaRPr lang="en-US" dirty="0"/>
           </a:p>
@@ -2957,7 +3046,7 @@
           <a:p>
             <a:r>
               <a:rPr lang="en-US" dirty="0"/>
-              <a:t/>
+              <a:t>O Censo Demográfico é universal, porque visita todos os domicílios do país; é decenal; e é detalhado, com dados para municípios, bairros e setores censitários. O mais recente foi realizado em 2022, adiado de 2020. Para o gestor, ele traz o perfil da população: idade, sexo, cor ou raça, escolaridade, renda e condições de moradia. Serve de denominador para as taxas e de base para as estimativas populacionais anuais, usadas na distribuição do FPM. E é a base do IDHM e dos indicadores do Atlas Brasil.</a:t>
             </a:r>
             <a:endParaRPr lang="en-US" dirty="0"/>
           </a:p>
@@ -3045,7 +3134,7 @@
           <a:p>
             <a:r>
               <a:rPr lang="en-US" dirty="0"/>
-              <a:t/>
+              <a:t>Veja o que o Censo revela sobre Mato Grosso. [Apontar para as colunas.] A população do estado passou de cerca de 2 milhões em 1991 para 3,66 milhões em 2022. Entre 2010 e 2022, Mato Grosso cresceu cerca de 20,5%, enquanto o Brasil cresceu cerca de 6,5%. Mais população muda a demanda por escolas e saúde e também o valor do FPM que chega aos municípios.</a:t>
             </a:r>
             <a:endParaRPr lang="en-US" dirty="0"/>
           </a:p>
@@ -3133,7 +3222,7 @@
           <a:p>
             <a:r>
               <a:rPr lang="en-US" dirty="0"/>
-              <a:t/>
+              <a:t>Além do Censo, o IBGE faz pesquisas amostrais e institucionais. A PNAD Contínua, trimestral, investiga trabalho, desocupação, informalidade e rendimento. A POF, a Pesquisa de Orçamentos Familiares, é a base dos pesos dos índices de preços. A PNS investiga as condições de saúde e o acesso a serviços. E a MUNIC, pesquisa institucional, mostra a estrutura e a gestão das prefeituras, como conselhos, planos e órgãos. Atenção: pesquisas amostrais como a PNAD Contínua não produzem resultados para a maioria dos municípios.</a:t>
             </a:r>
             <a:endParaRPr lang="en-US" dirty="0"/>
           </a:p>
@@ -3221,7 +3310,7 @@
           <a:p>
             <a:r>
               <a:rPr lang="en-US" dirty="0"/>
-              <a:t/>
+              <a:t>Parte 2, que corresponde ao tópico 6 do sumário: registros administrativos, cadastros e portais. São dados que nascem da própria gestão das políticas.</a:t>
             </a:r>
             <a:endParaRPr lang="en-US" dirty="0"/>
           </a:p>
@@ -3963,7 +4052,7 @@
                         <a:buNone/>
                       </a:pPr>
                       <a:r>
-                        <a:rPr lang="en-US" sz="1300" b="1" dirty="0">
+                        <a:rPr lang="en-US" sz="1250" b="1" dirty="0">
                           <a:solidFill>
                             <a:srgbClr val="FFFFFF"/>
                           </a:solidFill>
@@ -3973,7 +4062,7 @@
                         </a:rPr>
                         <a:t>Registro</a:t>
                       </a:r>
-                      <a:endParaRPr lang="en-US" sz="1300" dirty="0">
+                      <a:endParaRPr lang="en-US" sz="1250" dirty="0">
                         <a:latin typeface="Calibri" charset="0"/>
                         <a:ea typeface="Calibri" charset="0"/>
                         <a:cs typeface="Calibri" charset="0"/>
@@ -4031,7 +4120,7 @@
                         <a:buNone/>
                       </a:pPr>
                       <a:r>
-                        <a:rPr lang="en-US" sz="1300" b="1" dirty="0">
+                        <a:rPr lang="en-US" sz="1250" b="1" dirty="0">
                           <a:solidFill>
                             <a:srgbClr val="FFFFFF"/>
                           </a:solidFill>
@@ -4041,7 +4130,7 @@
                         </a:rPr>
                         <a:t>Órgão</a:t>
                       </a:r>
-                      <a:endParaRPr lang="en-US" sz="1300" dirty="0">
+                      <a:endParaRPr lang="en-US" sz="1250" dirty="0">
                         <a:latin typeface="Calibri" charset="0"/>
                         <a:ea typeface="Calibri" charset="0"/>
                         <a:cs typeface="Calibri" charset="0"/>
@@ -4099,7 +4188,7 @@
                         <a:buNone/>
                       </a:pPr>
                       <a:r>
-                        <a:rPr lang="en-US" sz="1300" b="1" dirty="0">
+                        <a:rPr lang="en-US" sz="1250" b="1" dirty="0">
                           <a:solidFill>
                             <a:srgbClr val="FFFFFF"/>
                           </a:solidFill>
@@ -4109,7 +4198,7 @@
                         </a:rPr>
                         <a:t>Indicadores possíveis</a:t>
                       </a:r>
-                      <a:endParaRPr lang="en-US" sz="1300" dirty="0">
+                      <a:endParaRPr lang="en-US" sz="1250" dirty="0">
                         <a:latin typeface="Calibri" charset="0"/>
                         <a:ea typeface="Calibri" charset="0"/>
                         <a:cs typeface="Calibri" charset="0"/>
@@ -4169,7 +4258,7 @@
                         <a:buNone/>
                       </a:pPr>
                       <a:r>
-                        <a:rPr lang="en-US" sz="1300" b="1" dirty="0">
+                        <a:rPr lang="en-US" sz="1250" b="1" dirty="0">
                           <a:solidFill>
                             <a:srgbClr val="1F2A37"/>
                           </a:solidFill>
@@ -4179,7 +4268,7 @@
                         </a:rPr>
                         <a:t>SIM e SINASC</a:t>
                       </a:r>
-                      <a:endParaRPr lang="en-US" sz="1300" dirty="0">
+                      <a:endParaRPr lang="en-US" sz="1250" dirty="0">
                         <a:latin typeface="Calibri" charset="0"/>
                         <a:ea typeface="Calibri" charset="0"/>
                         <a:cs typeface="Calibri" charset="0"/>
@@ -4237,7 +4326,7 @@
                         <a:buNone/>
                       </a:pPr>
                       <a:r>
-                        <a:rPr lang="en-US" sz="1300" dirty="0">
+                        <a:rPr lang="en-US" sz="1250" dirty="0">
                           <a:solidFill>
                             <a:srgbClr val="1F2A37"/>
                           </a:solidFill>
@@ -4245,9 +4334,9 @@
                           <a:ea typeface="Calibri" pitchFamily="34" charset="-122"/>
                           <a:cs typeface="Calibri" pitchFamily="34" charset="-120"/>
                         </a:rPr>
-                        <a:t>Ministério da Saúde</a:t>
+                        <a:t>Ministério da Saúde (DATASUS)</a:t>
                       </a:r>
-                      <a:endParaRPr lang="en-US" sz="1300" dirty="0">
+                      <a:endParaRPr lang="en-US" sz="1250" dirty="0">
                         <a:latin typeface="Calibri" charset="0"/>
                         <a:ea typeface="Calibri" charset="0"/>
                         <a:cs typeface="Calibri" charset="0"/>
@@ -4305,7 +4394,7 @@
                         <a:buNone/>
                       </a:pPr>
                       <a:r>
-                        <a:rPr lang="en-US" sz="1300" dirty="0">
+                        <a:rPr lang="en-US" sz="1250" dirty="0">
                           <a:solidFill>
                             <a:srgbClr val="1F2A37"/>
                           </a:solidFill>
@@ -4313,9 +4402,9 @@
                           <a:ea typeface="Calibri" pitchFamily="34" charset="-122"/>
                           <a:cs typeface="Calibri" pitchFamily="34" charset="-120"/>
                         </a:rPr>
-                        <a:t>Mortalidade infantil e por causas; nascidos vivos</a:t>
+                        <a:t>Mortalidade infantil e por causas; nascidos vivos; pré-natal</a:t>
                       </a:r>
-                      <a:endParaRPr lang="en-US" sz="1300" dirty="0">
+                      <a:endParaRPr lang="en-US" sz="1250" dirty="0">
                         <a:latin typeface="Calibri" charset="0"/>
                         <a:ea typeface="Calibri" charset="0"/>
                         <a:cs typeface="Calibri" charset="0"/>
@@ -4375,7 +4464,7 @@
                         <a:buNone/>
                       </a:pPr>
                       <a:r>
-                        <a:rPr lang="en-US" sz="1300" b="1" dirty="0">
+                        <a:rPr lang="en-US" sz="1250" b="1" dirty="0">
                           <a:solidFill>
                             <a:srgbClr val="1F2A37"/>
                           </a:solidFill>
@@ -4383,9 +4472,9 @@
                           <a:ea typeface="Calibri" pitchFamily="34" charset="-122"/>
                           <a:cs typeface="Calibri" pitchFamily="34" charset="-120"/>
                         </a:rPr>
-                        <a:t>Censo Escolar, SAEB</a:t>
+                        <a:t>Censo Escolar e SAEB</a:t>
                       </a:r>
-                      <a:endParaRPr lang="en-US" sz="1300" dirty="0">
+                      <a:endParaRPr lang="en-US" sz="1250" dirty="0">
                         <a:latin typeface="Calibri" charset="0"/>
                         <a:ea typeface="Calibri" charset="0"/>
                         <a:cs typeface="Calibri" charset="0"/>
@@ -4443,7 +4532,7 @@
                         <a:buNone/>
                       </a:pPr>
                       <a:r>
-                        <a:rPr lang="en-US" sz="1300" dirty="0">
+                        <a:rPr lang="en-US" sz="1250" dirty="0">
                           <a:solidFill>
                             <a:srgbClr val="1F2A37"/>
                           </a:solidFill>
@@ -4451,9 +4540,9 @@
                           <a:ea typeface="Calibri" pitchFamily="34" charset="-122"/>
                           <a:cs typeface="Calibri" pitchFamily="34" charset="-120"/>
                         </a:rPr>
-                        <a:t>INEP (MEC)</a:t>
+                        <a:t>INEP</a:t>
                       </a:r>
-                      <a:endParaRPr lang="en-US" sz="1300" dirty="0">
+                      <a:endParaRPr lang="en-US" sz="1250" dirty="0">
                         <a:latin typeface="Calibri" charset="0"/>
                         <a:ea typeface="Calibri" charset="0"/>
                         <a:cs typeface="Calibri" charset="0"/>
@@ -4511,7 +4600,7 @@
                         <a:buNone/>
                       </a:pPr>
                       <a:r>
-                        <a:rPr lang="en-US" sz="1300" dirty="0">
+                        <a:rPr lang="en-US" sz="1250" dirty="0">
                           <a:solidFill>
                             <a:srgbClr val="1F2A37"/>
                           </a:solidFill>
@@ -4519,9 +4608,9 @@
                           <a:ea typeface="Calibri" pitchFamily="34" charset="-122"/>
                           <a:cs typeface="Calibri" pitchFamily="34" charset="-120"/>
                         </a:rPr>
-                        <a:t>Matrículas, rendimento escolar, IDEB</a:t>
+                        <a:t>Matrículas, aprovação, distorção idade-série, IDEB</a:t>
                       </a:r>
-                      <a:endParaRPr lang="en-US" sz="1300" dirty="0">
+                      <a:endParaRPr lang="en-US" sz="1250" dirty="0">
                         <a:latin typeface="Calibri" charset="0"/>
                         <a:ea typeface="Calibri" charset="0"/>
                         <a:cs typeface="Calibri" charset="0"/>
@@ -4581,7 +4670,7 @@
                         <a:buNone/>
                       </a:pPr>
                       <a:r>
-                        <a:rPr lang="en-US" sz="1300" b="1" dirty="0">
+                        <a:rPr lang="en-US" sz="1250" b="1" dirty="0">
                           <a:solidFill>
                             <a:srgbClr val="1F2A37"/>
                           </a:solidFill>
@@ -4591,7 +4680,7 @@
                         </a:rPr>
                         <a:t>RAIS e Novo CAGED</a:t>
                       </a:r>
-                      <a:endParaRPr lang="en-US" sz="1300" dirty="0">
+                      <a:endParaRPr lang="en-US" sz="1250" dirty="0">
                         <a:latin typeface="Calibri" charset="0"/>
                         <a:ea typeface="Calibri" charset="0"/>
                         <a:cs typeface="Calibri" charset="0"/>
@@ -4649,7 +4738,7 @@
                         <a:buNone/>
                       </a:pPr>
                       <a:r>
-                        <a:rPr lang="en-US" sz="1300" dirty="0">
+                        <a:rPr lang="en-US" sz="1250" dirty="0">
                           <a:solidFill>
                             <a:srgbClr val="1F2A37"/>
                           </a:solidFill>
@@ -4659,7 +4748,7 @@
                         </a:rPr>
                         <a:t>Ministério do Trabalho</a:t>
                       </a:r>
-                      <a:endParaRPr lang="en-US" sz="1300" dirty="0">
+                      <a:endParaRPr lang="en-US" sz="1250" dirty="0">
                         <a:latin typeface="Calibri" charset="0"/>
                         <a:ea typeface="Calibri" charset="0"/>
                         <a:cs typeface="Calibri" charset="0"/>
@@ -4717,7 +4806,7 @@
                         <a:buNone/>
                       </a:pPr>
                       <a:r>
-                        <a:rPr lang="en-US" sz="1300" dirty="0">
+                        <a:rPr lang="en-US" sz="1250" dirty="0">
                           <a:solidFill>
                             <a:srgbClr val="1F2A37"/>
                           </a:solidFill>
@@ -4725,9 +4814,9 @@
                           <a:ea typeface="Calibri" pitchFamily="34" charset="-122"/>
                           <a:cs typeface="Calibri" pitchFamily="34" charset="-120"/>
                         </a:rPr>
-                        <a:t>Emprego formal, salários, saldo de vagas</a:t>
+                        <a:t>Emprego formal, salários, saldo mensal de vagas</a:t>
                       </a:r>
-                      <a:endParaRPr lang="en-US" sz="1300" dirty="0">
+                      <a:endParaRPr lang="en-US" sz="1250" dirty="0">
                         <a:latin typeface="Calibri" charset="0"/>
                         <a:ea typeface="Calibri" charset="0"/>
                         <a:cs typeface="Calibri" charset="0"/>
@@ -4787,7 +4876,7 @@
                         <a:buNone/>
                       </a:pPr>
                       <a:r>
-                        <a:rPr lang="en-US" sz="1300" b="1" dirty="0">
+                        <a:rPr lang="en-US" sz="1250" b="1" dirty="0">
                           <a:solidFill>
                             <a:srgbClr val="1F2A37"/>
                           </a:solidFill>
@@ -4797,7 +4886,7 @@
                         </a:rPr>
                         <a:t>SICONFI</a:t>
                       </a:r>
-                      <a:endParaRPr lang="en-US" sz="1300" dirty="0">
+                      <a:endParaRPr lang="en-US" sz="1250" dirty="0">
                         <a:latin typeface="Calibri" charset="0"/>
                         <a:ea typeface="Calibri" charset="0"/>
                         <a:cs typeface="Calibri" charset="0"/>
@@ -4855,7 +4944,7 @@
                         <a:buNone/>
                       </a:pPr>
                       <a:r>
-                        <a:rPr lang="en-US" sz="1300" dirty="0">
+                        <a:rPr lang="en-US" sz="1250" dirty="0">
                           <a:solidFill>
                             <a:srgbClr val="1F2A37"/>
                           </a:solidFill>
@@ -4865,7 +4954,7 @@
                         </a:rPr>
                         <a:t>Tesouro Nacional</a:t>
                       </a:r>
-                      <a:endParaRPr lang="en-US" sz="1300" dirty="0">
+                      <a:endParaRPr lang="en-US" sz="1250" dirty="0">
                         <a:latin typeface="Calibri" charset="0"/>
                         <a:ea typeface="Calibri" charset="0"/>
                         <a:cs typeface="Calibri" charset="0"/>
@@ -4923,7 +5012,7 @@
                         <a:buNone/>
                       </a:pPr>
                       <a:r>
-                        <a:rPr lang="en-US" sz="1300" dirty="0">
+                        <a:rPr lang="en-US" sz="1250" dirty="0">
                           <a:solidFill>
                             <a:srgbClr val="1F2A37"/>
                           </a:solidFill>
@@ -4931,9 +5020,9 @@
                           <a:ea typeface="Calibri" pitchFamily="34" charset="-122"/>
                           <a:cs typeface="Calibri" pitchFamily="34" charset="-120"/>
                         </a:rPr>
-                        <a:t>Receitas, despesas e gasto com pessoal</a:t>
+                        <a:t>Receitas, despesas, gasto com pessoal dos municípios</a:t>
                       </a:r>
-                      <a:endParaRPr lang="en-US" sz="1300" dirty="0">
+                      <a:endParaRPr lang="en-US" sz="1250" dirty="0">
                         <a:latin typeface="Calibri" charset="0"/>
                         <a:ea typeface="Calibri" charset="0"/>
                         <a:cs typeface="Calibri" charset="0"/>
@@ -4993,7 +5082,7 @@
                         <a:buNone/>
                       </a:pPr>
                       <a:r>
-                        <a:rPr lang="en-US" sz="1300" b="1" dirty="0">
+                        <a:rPr lang="en-US" sz="1250" b="1" dirty="0">
                           <a:solidFill>
                             <a:srgbClr val="1F2A37"/>
                           </a:solidFill>
@@ -5003,7 +5092,7 @@
                         </a:rPr>
                         <a:t>Estatísticas eleitorais</a:t>
                       </a:r>
-                      <a:endParaRPr lang="en-US" sz="1300" dirty="0">
+                      <a:endParaRPr lang="en-US" sz="1250" dirty="0">
                         <a:latin typeface="Calibri" charset="0"/>
                         <a:ea typeface="Calibri" charset="0"/>
                         <a:cs typeface="Calibri" charset="0"/>
@@ -5061,7 +5150,7 @@
                         <a:buNone/>
                       </a:pPr>
                       <a:r>
-                        <a:rPr lang="en-US" sz="1300" dirty="0">
+                        <a:rPr lang="en-US" sz="1250" dirty="0">
                           <a:solidFill>
                             <a:srgbClr val="1F2A37"/>
                           </a:solidFill>
@@ -5071,7 +5160,7 @@
                         </a:rPr>
                         <a:t>TSE</a:t>
                       </a:r>
-                      <a:endParaRPr lang="en-US" sz="1300" dirty="0">
+                      <a:endParaRPr lang="en-US" sz="1250" dirty="0">
                         <a:latin typeface="Calibri" charset="0"/>
                         <a:ea typeface="Calibri" charset="0"/>
                         <a:cs typeface="Calibri" charset="0"/>
@@ -5129,7 +5218,7 @@
                         <a:buNone/>
                       </a:pPr>
                       <a:r>
-                        <a:rPr lang="en-US" sz="1300" dirty="0">
+                        <a:rPr lang="en-US" sz="1250" dirty="0">
                           <a:solidFill>
                             <a:srgbClr val="1F2A37"/>
                           </a:solidFill>
@@ -5139,7 +5228,7 @@
                         </a:rPr>
                         <a:t>Eleitorado e participação</a:t>
                       </a:r>
-                      <a:endParaRPr lang="en-US" sz="1300" dirty="0">
+                      <a:endParaRPr lang="en-US" sz="1250" dirty="0">
                         <a:latin typeface="Calibri" charset="0"/>
                         <a:ea typeface="Calibri" charset="0"/>
                         <a:cs typeface="Calibri" charset="0"/>
@@ -5201,12 +5290,12 @@
         </p:nvSpPr>
         <p:spPr>
           <a:xfrm>
-            <a:off x="685800" y="3611880"/>
-            <a:ext cx="7772400" cy="658368"/>
+            <a:off x="685800" y="3767328"/>
+            <a:ext cx="7772400" cy="603504"/>
           </a:xfrm>
           <a:prstGeom prst="roundRect">
             <a:avLst>
-              <a:gd name="adj" fmla="val 11111"/>
+              <a:gd name="adj" fmla="val 12121"/>
             </a:avLst>
           </a:prstGeom>
           <a:solidFill>
@@ -5275,7 +5364,7 @@
                 <a:ea typeface="Calibri" pitchFamily="34" charset="-122"/>
                 <a:cs typeface="Calibri" pitchFamily="34" charset="-120"/>
               </a:rPr>
-              <a:t>Indicadores Socioeconômicos · Unidade 3</a:t>
+              <a:t>Indicadores Socioeconômicos · Unidade 3 · Tópico 6 do sumário</a:t>
             </a:r>
             <a:endParaRPr lang="en-US" sz="950" dirty="0"/>
           </a:p>
@@ -5612,7 +5701,7 @@
                 <a:ea typeface="Calibri" pitchFamily="34" charset="-122"/>
                 <a:cs typeface="Calibri" pitchFamily="34" charset="-120"/>
               </a:rPr>
-              <a:t>Indicadores Socioeconômicos · Unidade 3</a:t>
+              <a:t>Indicadores Socioeconômicos · Unidade 3 · Tópico 6 do sumário</a:t>
             </a:r>
             <a:endParaRPr lang="en-US" sz="950" dirty="0"/>
           </a:p>
@@ -6025,7 +6114,7 @@
                 <a:ea typeface="Calibri" pitchFamily="34" charset="-122"/>
                 <a:cs typeface="Calibri" pitchFamily="34" charset="-120"/>
               </a:rPr>
-              <a:t>Indicadores Socioeconômicos · Unidade 3</a:t>
+              <a:t>Indicadores Socioeconômicos · Unidade 3 · Tópico 6 do sumário</a:t>
             </a:r>
             <a:endParaRPr lang="en-US" sz="950" dirty="0"/>
           </a:p>
@@ -7018,7 +7107,7 @@
                 <a:ea typeface="Calibri" pitchFamily="34" charset="-122"/>
                 <a:cs typeface="Calibri" pitchFamily="34" charset="-120"/>
               </a:rPr>
-              <a:t>Indicadores Socioeconômicos · Unidade 3</a:t>
+              <a:t>Indicadores Socioeconômicos · Unidade 3 · Tópico 6 do sumário</a:t>
             </a:r>
             <a:endParaRPr lang="en-US" sz="950" dirty="0"/>
           </a:p>
@@ -8183,7 +8272,7 @@
                 <a:ea typeface="Calibri" pitchFamily="34" charset="-122"/>
                 <a:cs typeface="Calibri" pitchFamily="34" charset="-120"/>
               </a:rPr>
-              <a:t>Indicadores Socioeconômicos · Unidade 3</a:t>
+              <a:t>Indicadores Socioeconômicos · Unidade 3 · Tópico 6 do sumário</a:t>
             </a:r>
             <a:endParaRPr lang="en-US" sz="950" dirty="0"/>
           </a:p>
@@ -11858,7 +11947,7 @@
                 <a:ea typeface="Calibri" pitchFamily="34" charset="-122"/>
                 <a:cs typeface="Calibri" pitchFamily="34" charset="-120"/>
               </a:rPr>
-              <a:t>Página de conteúdos: Unidades 5 e 6 · Encontro síncrono (19h)</a:t>
+              <a:t>Página de conteúdos: tópicos 5 e 6 do sumário · Encontro síncrono (19h)</a:t>
             </a:r>
             <a:endParaRPr lang="en-US" sz="1500" dirty="0"/>
           </a:p>
@@ -16499,6 +16588,557 @@
 </p:sld>
 </file>
 
+<file path=ppt/slides/slide27.xml><?xml version="1.0" encoding="utf-8"?>
+<p:sld xmlns:a="http://schemas.openxmlformats.org/drawingml/2006/main" xmlns:r="http://schemas.openxmlformats.org/officeDocument/2006/relationships" xmlns:p="http://schemas.openxmlformats.org/presentationml/2006/main">
+  <p:cSld name="Slide 27">
+    <p:bg>
+      <p:bgPr>
+        <a:blipFill dpi="0" rotWithShape="1">
+          <a:blip r:embed="rId1">
+            <a:lum/>
+          </a:blip>
+          <a:srcRect/>
+          <a:stretch>
+            <a:fillRect/>
+          </a:stretch>
+        </a:blipFill>
+        <a:effectLst/>
+      </p:bgPr>
+    </p:bg>
+    <p:spTree>
+      <p:nvGrpSpPr>
+        <p:cNvPr id="1" name=""/>
+        <p:cNvGrpSpPr/>
+        <p:nvPr/>
+      </p:nvGrpSpPr>
+      <p:grpSpPr>
+        <a:xfrm>
+          <a:off x="0" y="0"/>
+          <a:ext cx="0" cy="0"/>
+          <a:chOff x="0" y="0"/>
+          <a:chExt cx="0" cy="0"/>
+        </a:xfrm>
+      </p:grpSpPr>
+      <p:sp>
+        <p:nvSpPr>
+          <p:cNvPr id="2" name="Text 0"/>
+          <p:cNvSpPr txBox="1"/>
+          <p:nvPr/>
+        </p:nvSpPr>
+        <p:spPr>
+          <a:xfrm>
+            <a:off x="731520" y="256032"/>
+            <a:ext cx="7680960" cy="566928"/>
+          </a:xfrm>
+          <a:prstGeom prst="rect">
+            <a:avLst/>
+          </a:prstGeom>
+          <a:noFill/>
+          <a:ln/>
+        </p:spPr>
+        <p:txBody>
+          <a:bodyPr wrap="square" lIns="0" tIns="0" rIns="0" bIns="0" rtlCol="0" anchor="ctr"/>
+          <a:lstStyle/>
+          <a:p>
+            <a:pPr algn="ctr" indent="0" marL="0">
+              <a:lnSpc>
+                <a:spcPct val="100000"/>
+              </a:lnSpc>
+              <a:buNone/>
+            </a:pPr>
+            <a:r>
+              <a:rPr lang="en-US" sz="2800" b="1" dirty="0">
+                <a:solidFill>
+                  <a:srgbClr val="13294B"/>
+                </a:solidFill>
+                <a:latin typeface="Calibri" pitchFamily="34" charset="0"/>
+                <a:ea typeface="Calibri" pitchFamily="34" charset="-122"/>
+                <a:cs typeface="Calibri" pitchFamily="34" charset="-120"/>
+              </a:rPr>
+              <a:t>Resumo da Unidade 3</a:t>
+            </a:r>
+            <a:endParaRPr lang="en-US" sz="2800" dirty="0"/>
+          </a:p>
+        </p:txBody>
+      </p:sp>
+      <p:sp>
+        <p:nvSpPr>
+          <p:cNvPr id="3" name="Text 1"/>
+          <p:cNvSpPr txBox="1"/>
+          <p:nvPr/>
+        </p:nvSpPr>
+        <p:spPr>
+          <a:xfrm>
+            <a:off x="1005840" y="804672"/>
+            <a:ext cx="7132320" cy="329184"/>
+          </a:xfrm>
+          <a:prstGeom prst="rect">
+            <a:avLst/>
+          </a:prstGeom>
+          <a:noFill/>
+          <a:ln/>
+        </p:spPr>
+        <p:txBody>
+          <a:bodyPr wrap="square" lIns="0" tIns="0" rIns="0" bIns="0" rtlCol="0" anchor="ctr"/>
+          <a:lstStyle/>
+          <a:p>
+            <a:pPr algn="ctr" indent="0" marL="0">
+              <a:lnSpc>
+                <a:spcPct val="100000"/>
+              </a:lnSpc>
+              <a:buNone/>
+            </a:pPr>
+            <a:r>
+              <a:rPr lang="en-US" sz="1400" dirty="0">
+                <a:solidFill>
+                  <a:srgbClr val="5B6770"/>
+                </a:solidFill>
+                <a:latin typeface="Calibri" pitchFamily="34" charset="0"/>
+                <a:ea typeface="Calibri" pitchFamily="34" charset="-122"/>
+                <a:cs typeface="Calibri" pitchFamily="34" charset="-120"/>
+              </a:rPr>
+              <a:t>O que discutimos nesta unidade</a:t>
+            </a:r>
+            <a:endParaRPr lang="en-US" sz="1400" dirty="0"/>
+          </a:p>
+        </p:txBody>
+      </p:sp>
+      <p:sp>
+        <p:nvSpPr>
+          <p:cNvPr id="4" name="Text 2"/>
+          <p:cNvSpPr txBox="1"/>
+          <p:nvPr/>
+        </p:nvSpPr>
+        <p:spPr>
+          <a:xfrm>
+            <a:off x="685800" y="1170432"/>
+            <a:ext cx="3794760" cy="2743200"/>
+          </a:xfrm>
+          <a:prstGeom prst="roundRect">
+            <a:avLst>
+              <a:gd name="adj" fmla="val 2000"/>
+            </a:avLst>
+          </a:prstGeom>
+          <a:solidFill>
+            <a:srgbClr val="FFFFFF"/>
+          </a:solidFill>
+          <a:ln w="12700">
+            <a:solidFill>
+              <a:srgbClr val="DCD5C1"/>
+            </a:solidFill>
+          </a:ln>
+        </p:spPr>
+        <p:txBody>
+          <a:bodyPr wrap="square" lIns="114300" tIns="114300" rIns="114300" bIns="114300" rtlCol="0" anchor="t"/>
+          <a:lstStyle/>
+          <a:p>
+            <a:pPr algn="l" indent="0" marL="0">
+              <a:lnSpc>
+                <a:spcPct val="100000"/>
+              </a:lnSpc>
+              <a:spcAft>
+                <a:spcPts val="200"/>
+              </a:spcAft>
+              <a:buNone/>
+            </a:pPr>
+            <a:r>
+              <a:rPr lang="en-US" sz="1100" b="1" dirty="0">
+                <a:solidFill>
+                  <a:srgbClr val="2A8C85"/>
+                </a:solidFill>
+                <a:latin typeface="Calibri" pitchFamily="34" charset="0"/>
+                <a:ea typeface="Calibri" pitchFamily="34" charset="-122"/>
+                <a:cs typeface="Calibri" pitchFamily="34" charset="-120"/>
+              </a:rPr>
+              <a:t>PARTE 1 · TÓPICO 5</a:t>
+            </a:r>
+            <a:endParaRPr lang="en-US" sz="1100" dirty="0"/>
+          </a:p>
+          <a:p>
+            <a:pPr algn="l" indent="0" marL="0">
+              <a:lnSpc>
+                <a:spcPct val="100000"/>
+              </a:lnSpc>
+              <a:spcAft>
+                <a:spcPts val="400"/>
+              </a:spcAft>
+              <a:buNone/>
+            </a:pPr>
+            <a:r>
+              <a:rPr lang="en-US" sz="1450" b="1" dirty="0">
+                <a:solidFill>
+                  <a:srgbClr val="13294B"/>
+                </a:solidFill>
+                <a:latin typeface="Calibri" pitchFamily="34" charset="0"/>
+                <a:ea typeface="Calibri" pitchFamily="34" charset="-122"/>
+                <a:cs typeface="Calibri" pitchFamily="34" charset="-120"/>
+              </a:rPr>
+              <a:t>Produtores de dados, Censo e pesquisas do IBGE</a:t>
+            </a:r>
+            <a:endParaRPr lang="en-US" sz="1100" dirty="0"/>
+          </a:p>
+          <a:p>
+            <a:pPr algn="l" marL="177800" indent="-177800">
+              <a:lnSpc>
+                <a:spcPct val="100000"/>
+              </a:lnSpc>
+              <a:spcAft>
+                <a:spcPts val="300"/>
+              </a:spcAft>
+              <a:buSzPct val="100000"/>
+              <a:buChar char="•"/>
+            </a:pPr>
+            <a:r>
+              <a:rPr lang="en-US" sz="1200" dirty="0">
+                <a:solidFill>
+                  <a:srgbClr val="1F2A37"/>
+                </a:solidFill>
+                <a:latin typeface="Calibri" pitchFamily="34" charset="0"/>
+                <a:ea typeface="Calibri" pitchFamily="34" charset="-122"/>
+                <a:cs typeface="Calibri" pitchFamily="34" charset="-120"/>
+              </a:rPr>
+              <a:t>O IBGE coordena o sistema; ministérios, Banco Central, Tesouro, IPEA, PNUD e FJP o completam.</a:t>
+            </a:r>
+            <a:endParaRPr lang="en-US" sz="1100" dirty="0"/>
+          </a:p>
+          <a:p>
+            <a:pPr algn="l" marL="177800" indent="-177800">
+              <a:lnSpc>
+                <a:spcPct val="100000"/>
+              </a:lnSpc>
+              <a:spcAft>
+                <a:spcPts val="300"/>
+              </a:spcAft>
+              <a:buSzPct val="100000"/>
+              <a:buChar char="•"/>
+            </a:pPr>
+            <a:r>
+              <a:rPr lang="en-US" sz="1200" dirty="0">
+                <a:solidFill>
+                  <a:srgbClr val="1F2A37"/>
+                </a:solidFill>
+                <a:latin typeface="Calibri" pitchFamily="34" charset="0"/>
+                <a:ea typeface="Calibri" pitchFamily="34" charset="-122"/>
+                <a:cs typeface="Calibri" pitchFamily="34" charset="-120"/>
+              </a:rPr>
+              <a:t>Censos, pesquisas amostrais e registros: vantagens e limites.</a:t>
+            </a:r>
+            <a:endParaRPr lang="en-US" sz="1100" dirty="0"/>
+          </a:p>
+          <a:p>
+            <a:pPr algn="l" marL="177800" indent="-177800">
+              <a:lnSpc>
+                <a:spcPct val="100000"/>
+              </a:lnSpc>
+              <a:spcAft>
+                <a:spcPts val="300"/>
+              </a:spcAft>
+              <a:buSzPct val="100000"/>
+              <a:buChar char="•"/>
+            </a:pPr>
+            <a:r>
+              <a:rPr lang="en-US" sz="1200" dirty="0">
+                <a:solidFill>
+                  <a:srgbClr val="1F2A37"/>
+                </a:solidFill>
+                <a:latin typeface="Calibri" pitchFamily="34" charset="0"/>
+                <a:ea typeface="Calibri" pitchFamily="34" charset="-122"/>
+                <a:cs typeface="Calibri" pitchFamily="34" charset="-120"/>
+              </a:rPr>
+              <a:t>Censo 2022: universal e decenal; base das estimativas e do FPM.</a:t>
+            </a:r>
+            <a:endParaRPr lang="en-US" sz="1100" dirty="0"/>
+          </a:p>
+          <a:p>
+            <a:pPr algn="l" marL="177800" indent="-177800">
+              <a:lnSpc>
+                <a:spcPct val="100000"/>
+              </a:lnSpc>
+              <a:spcAft>
+                <a:spcPts val="300"/>
+              </a:spcAft>
+              <a:buSzPct val="100000"/>
+              <a:buChar char="•"/>
+            </a:pPr>
+            <a:r>
+              <a:rPr lang="en-US" sz="1200" dirty="0">
+                <a:solidFill>
+                  <a:srgbClr val="1F2A37"/>
+                </a:solidFill>
+                <a:latin typeface="Calibri" pitchFamily="34" charset="0"/>
+                <a:ea typeface="Calibri" pitchFamily="34" charset="-122"/>
+                <a:cs typeface="Calibri" pitchFamily="34" charset="-120"/>
+              </a:rPr>
+              <a:t>PNAD Contínua, POF, PNS e MUNIC, em geral sem dados municipais.</a:t>
+            </a:r>
+            <a:endParaRPr lang="en-US" sz="1100" dirty="0"/>
+          </a:p>
+        </p:txBody>
+      </p:sp>
+      <p:sp>
+        <p:nvSpPr>
+          <p:cNvPr id="5" name="Text 3"/>
+          <p:cNvSpPr txBox="1"/>
+          <p:nvPr/>
+        </p:nvSpPr>
+        <p:spPr>
+          <a:xfrm>
+            <a:off x="4663440" y="1170432"/>
+            <a:ext cx="3794760" cy="2743200"/>
+          </a:xfrm>
+          <a:prstGeom prst="roundRect">
+            <a:avLst>
+              <a:gd name="adj" fmla="val 2000"/>
+            </a:avLst>
+          </a:prstGeom>
+          <a:solidFill>
+            <a:srgbClr val="E6F2F0"/>
+          </a:solidFill>
+          <a:ln/>
+        </p:spPr>
+        <p:txBody>
+          <a:bodyPr wrap="square" lIns="114300" tIns="114300" rIns="114300" bIns="114300" rtlCol="0" anchor="t"/>
+          <a:lstStyle/>
+          <a:p>
+            <a:pPr algn="l" indent="0" marL="0">
+              <a:lnSpc>
+                <a:spcPct val="100000"/>
+              </a:lnSpc>
+              <a:spcAft>
+                <a:spcPts val="200"/>
+              </a:spcAft>
+              <a:buNone/>
+            </a:pPr>
+            <a:r>
+              <a:rPr lang="en-US" sz="1100" b="1" dirty="0">
+                <a:solidFill>
+                  <a:srgbClr val="2A8C85"/>
+                </a:solidFill>
+                <a:latin typeface="Calibri" pitchFamily="34" charset="0"/>
+                <a:ea typeface="Calibri" pitchFamily="34" charset="-122"/>
+                <a:cs typeface="Calibri" pitchFamily="34" charset="-120"/>
+              </a:rPr>
+              <a:t>PARTE 2 · TÓPICO 6</a:t>
+            </a:r>
+            <a:endParaRPr lang="en-US" sz="1100" dirty="0"/>
+          </a:p>
+          <a:p>
+            <a:pPr algn="l" indent="0" marL="0">
+              <a:lnSpc>
+                <a:spcPct val="100000"/>
+              </a:lnSpc>
+              <a:spcAft>
+                <a:spcPts val="400"/>
+              </a:spcAft>
+              <a:buNone/>
+            </a:pPr>
+            <a:r>
+              <a:rPr lang="en-US" sz="1450" b="1" dirty="0">
+                <a:solidFill>
+                  <a:srgbClr val="13294B"/>
+                </a:solidFill>
+                <a:latin typeface="Calibri" pitchFamily="34" charset="0"/>
+                <a:ea typeface="Calibri" pitchFamily="34" charset="-122"/>
+                <a:cs typeface="Calibri" pitchFamily="34" charset="-120"/>
+              </a:rPr>
+              <a:t>Registros administrativos, cadastros e portais</a:t>
+            </a:r>
+            <a:endParaRPr lang="en-US" sz="1100" dirty="0"/>
+          </a:p>
+          <a:p>
+            <a:pPr algn="l" marL="177800" indent="-177800">
+              <a:lnSpc>
+                <a:spcPct val="100000"/>
+              </a:lnSpc>
+              <a:spcAft>
+                <a:spcPts val="300"/>
+              </a:spcAft>
+              <a:buSzPct val="100000"/>
+              <a:buChar char="•"/>
+            </a:pPr>
+            <a:r>
+              <a:rPr lang="en-US" sz="1200" dirty="0">
+                <a:solidFill>
+                  <a:srgbClr val="1F2A37"/>
+                </a:solidFill>
+                <a:latin typeface="Calibri" pitchFamily="34" charset="0"/>
+                <a:ea typeface="Calibri" pitchFamily="34" charset="-122"/>
+                <a:cs typeface="Calibri" pitchFamily="34" charset="-120"/>
+              </a:rPr>
+              <a:t>SIM e SINASC, Censo Escolar e SAEB, RAIS e CAGED, SICONFI.</a:t>
+            </a:r>
+            <a:endParaRPr lang="en-US" sz="1100" dirty="0"/>
+          </a:p>
+          <a:p>
+            <a:pPr algn="l" marL="177800" indent="-177800">
+              <a:lnSpc>
+                <a:spcPct val="100000"/>
+              </a:lnSpc>
+              <a:spcAft>
+                <a:spcPts val="300"/>
+              </a:spcAft>
+              <a:buSzPct val="100000"/>
+              <a:buChar char="•"/>
+            </a:pPr>
+            <a:r>
+              <a:rPr lang="en-US" sz="1200" dirty="0">
+                <a:solidFill>
+                  <a:srgbClr val="1F2A37"/>
+                </a:solidFill>
+                <a:latin typeface="Calibri" pitchFamily="34" charset="0"/>
+                <a:ea typeface="Calibri" pitchFamily="34" charset="-122"/>
+                <a:cs typeface="Calibri" pitchFamily="34" charset="-120"/>
+              </a:rPr>
+              <a:t>CadÚnico: base do Bolsa Família; cadastro de demanda.</a:t>
+            </a:r>
+            <a:endParaRPr lang="en-US" sz="1100" dirty="0"/>
+          </a:p>
+          <a:p>
+            <a:pPr algn="l" marL="177800" indent="-177800">
+              <a:lnSpc>
+                <a:spcPct val="100000"/>
+              </a:lnSpc>
+              <a:spcAft>
+                <a:spcPts val="300"/>
+              </a:spcAft>
+              <a:buSzPct val="100000"/>
+              <a:buChar char="•"/>
+            </a:pPr>
+            <a:r>
+              <a:rPr lang="en-US" sz="1200" dirty="0">
+                <a:solidFill>
+                  <a:srgbClr val="1F2A37"/>
+                </a:solidFill>
+                <a:latin typeface="Calibri" pitchFamily="34" charset="0"/>
+                <a:ea typeface="Calibri" pitchFamily="34" charset="-122"/>
+                <a:cs typeface="Calibri" pitchFamily="34" charset="-120"/>
+              </a:rPr>
+              <a:t>Portais: IBGE Cidades, SIDRA, Atlas Brasil, DATASUS e Transparência.</a:t>
+            </a:r>
+            <a:endParaRPr lang="en-US" sz="1100" dirty="0"/>
+          </a:p>
+          <a:p>
+            <a:pPr algn="l" marL="177800" indent="-177800">
+              <a:lnSpc>
+                <a:spcPct val="100000"/>
+              </a:lnSpc>
+              <a:spcAft>
+                <a:spcPts val="300"/>
+              </a:spcAft>
+              <a:buSzPct val="100000"/>
+              <a:buChar char="•"/>
+            </a:pPr>
+            <a:r>
+              <a:rPr lang="en-US" sz="1200" dirty="0">
+                <a:solidFill>
+                  <a:srgbClr val="1F2A37"/>
+                </a:solidFill>
+                <a:latin typeface="Calibri" pitchFamily="34" charset="0"/>
+                <a:ea typeface="Calibri" pitchFamily="34" charset="-122"/>
+                <a:cs typeface="Calibri" pitchFamily="34" charset="-120"/>
+              </a:rPr>
+              <a:t>Cada indicador tem a sua fonte: cite sempre a fonte e o ano.</a:t>
+            </a:r>
+            <a:endParaRPr lang="en-US" sz="1100" dirty="0"/>
+          </a:p>
+        </p:txBody>
+      </p:sp>
+      <p:sp>
+        <p:nvSpPr>
+          <p:cNvPr id="6" name="Text 4"/>
+          <p:cNvSpPr txBox="1"/>
+          <p:nvPr/>
+        </p:nvSpPr>
+        <p:spPr>
+          <a:xfrm>
+            <a:off x="685800" y="3995928"/>
+            <a:ext cx="7772400" cy="484632"/>
+          </a:xfrm>
+          <a:prstGeom prst="roundRect">
+            <a:avLst>
+              <a:gd name="adj" fmla="val 15094"/>
+            </a:avLst>
+          </a:prstGeom>
+          <a:solidFill>
+            <a:srgbClr val="E6F2F0"/>
+          </a:solidFill>
+          <a:ln/>
+        </p:spPr>
+        <p:txBody>
+          <a:bodyPr wrap="square" lIns="127000" tIns="127000" rIns="127000" bIns="127000" rtlCol="0" anchor="ctr"/>
+          <a:lstStyle/>
+          <a:p>
+            <a:pPr algn="ctr" indent="0" marL="0">
+              <a:lnSpc>
+                <a:spcPct val="100000"/>
+              </a:lnSpc>
+              <a:buNone/>
+            </a:pPr>
+            <a:r>
+              <a:rPr lang="en-US" sz="1300" b="1" dirty="0">
+                <a:solidFill>
+                  <a:srgbClr val="13294B"/>
+                </a:solidFill>
+                <a:latin typeface="Calibri" pitchFamily="34" charset="0"/>
+                <a:ea typeface="Calibri" pitchFamily="34" charset="-122"/>
+                <a:cs typeface="Calibri" pitchFamily="34" charset="-120"/>
+              </a:rPr>
+              <a:t>Próxima unidade: dados e indicadores econômicos e boletins de conjuntura.</a:t>
+            </a:r>
+            <a:endParaRPr lang="en-US" sz="1300" dirty="0"/>
+          </a:p>
+        </p:txBody>
+      </p:sp>
+      <p:sp>
+        <p:nvSpPr>
+          <p:cNvPr id="7" name="Text 5"/>
+          <p:cNvSpPr txBox="1"/>
+          <p:nvPr/>
+        </p:nvSpPr>
+        <p:spPr>
+          <a:xfrm>
+            <a:off x="4206240" y="36576"/>
+            <a:ext cx="4800600" cy="219456"/>
+          </a:xfrm>
+          <a:prstGeom prst="rect">
+            <a:avLst/>
+          </a:prstGeom>
+          <a:noFill/>
+          <a:ln/>
+        </p:spPr>
+        <p:txBody>
+          <a:bodyPr wrap="square" lIns="0" tIns="0" rIns="0" bIns="0" rtlCol="0" anchor="ctr"/>
+          <a:lstStyle/>
+          <a:p>
+            <a:pPr algn="r" indent="0" marL="0">
+              <a:lnSpc>
+                <a:spcPct val="100000"/>
+              </a:lnSpc>
+              <a:buNone/>
+            </a:pPr>
+            <a:r>
+              <a:rPr lang="en-US" sz="950" dirty="0">
+                <a:solidFill>
+                  <a:srgbClr val="5B6770"/>
+                </a:solidFill>
+                <a:latin typeface="Calibri" pitchFamily="34" charset="0"/>
+                <a:ea typeface="Calibri" pitchFamily="34" charset="-122"/>
+                <a:cs typeface="Calibri" pitchFamily="34" charset="-120"/>
+              </a:rPr>
+              <a:t>Indicadores Socioeconômicos · Unidade 3</a:t>
+            </a:r>
+            <a:endParaRPr lang="en-US" sz="950" dirty="0"/>
+          </a:p>
+        </p:txBody>
+      </p:sp>
+    </p:spTree>
+  </p:cSld>
+  <p:clrMapOvr>
+    <a:masterClrMapping/>
+  </p:clrMapOvr>
+</p:sld>
+</file>
+
 <file path=ppt/slides/slide3.xml><?xml version="1.0" encoding="utf-8"?>
 <p:sld xmlns:a="http://schemas.openxmlformats.org/drawingml/2006/main" xmlns:r="http://schemas.openxmlformats.org/officeDocument/2006/relationships" xmlns:p="http://schemas.openxmlformats.org/presentationml/2006/main">
   <p:cSld name="Slide 3">
@@ -16566,7 +17206,7 @@
                 <a:ea typeface="Calibri" pitchFamily="34" charset="-122"/>
                 <a:cs typeface="Calibri" pitchFamily="34" charset="-120"/>
               </a:rPr>
-              <a:t>PARTE 1</a:t>
+              <a:t>PARTE 1 · TÓPICO 5 DO SUMÁRIO</a:t>
             </a:r>
             <a:endParaRPr lang="en-US" sz="1600" dirty="0"/>
           </a:p>
@@ -16581,7 +17221,7 @@
         <p:spPr>
           <a:xfrm>
             <a:off x="731520" y="1874520"/>
-            <a:ext cx="7680960" cy="822960"/>
+            <a:ext cx="7680960" cy="1097280"/>
           </a:xfrm>
           <a:prstGeom prst="rect">
             <a:avLst/>
@@ -16600,7 +17240,7 @@
               <a:buNone/>
             </a:pPr>
             <a:r>
-              <a:rPr lang="en-US" sz="3600" b="1" dirty="0">
+              <a:rPr lang="en-US" sz="3000" b="1" dirty="0">
                 <a:solidFill>
                   <a:srgbClr val="13294B"/>
                 </a:solidFill>
@@ -16608,9 +17248,9 @@
                 <a:ea typeface="Calibri" pitchFamily="34" charset="-122"/>
                 <a:cs typeface="Calibri" pitchFamily="34" charset="-120"/>
               </a:rPr>
-              <a:t>Os produtores de dados no Brasil</a:t>
-            </a:r>
-            <a:endParaRPr lang="en-US" sz="3600" dirty="0"/>
+              <a:t>Produtores de dados, Censo e pesquisas do IBGE</a:t>
+            </a:r>
+            <a:endParaRPr lang="en-US" sz="3000" dirty="0"/>
           </a:p>
         </p:txBody>
       </p:sp>
@@ -16622,7 +17262,7 @@
         </p:nvSpPr>
         <p:spPr>
           <a:xfrm>
-            <a:off x="1188720" y="2697480"/>
+            <a:off x="1188720" y="2971800"/>
             <a:ext cx="6766560" cy="457200"/>
           </a:xfrm>
           <a:prstGeom prst="rect">
@@ -16692,7 +17332,7 @@
                 <a:ea typeface="Calibri" pitchFamily="34" charset="-122"/>
                 <a:cs typeface="Calibri" pitchFamily="34" charset="-120"/>
               </a:rPr>
-              <a:t>Indicadores Socioeconômicos · Unidade 3</a:t>
+              <a:t>Indicadores Socioeconômicos · Unidade 3 · Tópico 5 do sumário</a:t>
             </a:r>
             <a:endParaRPr lang="en-US" sz="950" dirty="0"/>
           </a:p>
@@ -17367,7 +18007,7 @@
                 <a:ea typeface="Calibri" pitchFamily="34" charset="-122"/>
                 <a:cs typeface="Calibri" pitchFamily="34" charset="-120"/>
               </a:rPr>
-              <a:t>Indicadores Socioeconômicos · Unidade 3</a:t>
+              <a:t>Indicadores Socioeconômicos · Unidade 3 · Tópico 5 do sumário</a:t>
             </a:r>
             <a:endParaRPr lang="en-US" sz="950" dirty="0"/>
           </a:p>
@@ -18433,7 +19073,7 @@
                 <a:ea typeface="Calibri" pitchFamily="34" charset="-122"/>
                 <a:cs typeface="Calibri" pitchFamily="34" charset="-120"/>
               </a:rPr>
-              <a:t>Indicadores Socioeconômicos · Unidade 3</a:t>
+              <a:t>Indicadores Socioeconômicos · Unidade 3 · Tópico 5 do sumário</a:t>
             </a:r>
             <a:endParaRPr lang="en-US" sz="950" dirty="0"/>
           </a:p>
@@ -19088,7 +19728,7 @@
                 <a:ea typeface="Calibri" pitchFamily="34" charset="-122"/>
                 <a:cs typeface="Calibri" pitchFamily="34" charset="-120"/>
               </a:rPr>
-              <a:t>Indicadores Socioeconômicos · Unidade 3</a:t>
+              <a:t>Indicadores Socioeconômicos · Unidade 3 · Tópico 5 do sumário</a:t>
             </a:r>
             <a:endParaRPr lang="en-US" sz="950" dirty="0"/>
           </a:p>
@@ -19501,7 +20141,7 @@
                 <a:ea typeface="Calibri" pitchFamily="34" charset="-122"/>
                 <a:cs typeface="Calibri" pitchFamily="34" charset="-120"/>
               </a:rPr>
-              <a:t>Indicadores Socioeconômicos · Unidade 3</a:t>
+              <a:t>Indicadores Socioeconômicos · Unidade 3 · Tópico 5 do sumário</a:t>
             </a:r>
             <a:endParaRPr lang="en-US" sz="950" dirty="0"/>
           </a:p>
@@ -20054,7 +20694,7 @@
                 <a:ea typeface="Calibri" pitchFamily="34" charset="-122"/>
                 <a:cs typeface="Calibri" pitchFamily="34" charset="-120"/>
               </a:rPr>
-              <a:t>Indicadores Socioeconômicos · Unidade 3</a:t>
+              <a:t>Indicadores Socioeconômicos · Unidade 3 · Tópico 5 do sumário</a:t>
             </a:r>
             <a:endParaRPr lang="en-US" sz="950" dirty="0"/>
           </a:p>
@@ -20135,7 +20775,7 @@
                 <a:ea typeface="Calibri" pitchFamily="34" charset="-122"/>
                 <a:cs typeface="Calibri" pitchFamily="34" charset="-120"/>
               </a:rPr>
-              <a:t>PARTE 2</a:t>
+              <a:t>PARTE 2 · TÓPICO 6 DO SUMÁRIO</a:t>
             </a:r>
             <a:endParaRPr lang="en-US" sz="1600" dirty="0"/>
           </a:p>
@@ -20150,7 +20790,7 @@
         <p:spPr>
           <a:xfrm>
             <a:off x="731520" y="1874520"/>
-            <a:ext cx="7680960" cy="822960"/>
+            <a:ext cx="7680960" cy="1097280"/>
           </a:xfrm>
           <a:prstGeom prst="rect">
             <a:avLst/>
@@ -20169,7 +20809,7 @@
               <a:buNone/>
             </a:pPr>
             <a:r>
-              <a:rPr lang="en-US" sz="3600" b="1" dirty="0">
+              <a:rPr lang="en-US" sz="3000" b="1" dirty="0">
                 <a:solidFill>
                   <a:srgbClr val="13294B"/>
                 </a:solidFill>
@@ -20177,9 +20817,9 @@
                 <a:ea typeface="Calibri" pitchFamily="34" charset="-122"/>
                 <a:cs typeface="Calibri" pitchFamily="34" charset="-120"/>
               </a:rPr>
-              <a:t>Registros administrativos e cadastros</a:t>
-            </a:r>
-            <a:endParaRPr lang="en-US" sz="3600" dirty="0"/>
+              <a:t>Registros administrativos, cadastros e portais</a:t>
+            </a:r>
+            <a:endParaRPr lang="en-US" sz="3000" dirty="0"/>
           </a:p>
         </p:txBody>
       </p:sp>
@@ -20191,7 +20831,7 @@
         </p:nvSpPr>
         <p:spPr>
           <a:xfrm>
-            <a:off x="1188720" y="2697480"/>
+            <a:off x="1188720" y="2971800"/>
             <a:ext cx="6766560" cy="457200"/>
           </a:xfrm>
           <a:prstGeom prst="rect">
@@ -20261,7 +20901,7 @@
                 <a:ea typeface="Calibri" pitchFamily="34" charset="-122"/>
                 <a:cs typeface="Calibri" pitchFamily="34" charset="-120"/>
               </a:rPr>
-              <a:t>Indicadores Socioeconômicos · Unidade 3</a:t>
+              <a:t>Indicadores Socioeconômicos · Unidade 3 · Tópico 6 do sumário</a:t>
             </a:r>
             <a:endParaRPr lang="en-US" sz="950" dirty="0"/>
           </a:p>
